--- a/files/cloud-or-fire-pillar.pptx
+++ b/files/cloud-or-fire-pillar.pptx
@@ -5,7 +5,7 @@
     <p:sldMasterId id="2147483866" r:id="rId1"/>
   </p:sldMasterIdLst>
   <p:notesMasterIdLst>
-    <p:notesMasterId r:id="rId17"/>
+    <p:notesMasterId r:id="rId12"/>
   </p:notesMasterIdLst>
   <p:sldIdLst>
     <p:sldId id="629" r:id="rId2"/>
@@ -18,11 +18,6 @@
     <p:sldId id="645" r:id="rId9"/>
     <p:sldId id="635" r:id="rId10"/>
     <p:sldId id="646" r:id="rId11"/>
-    <p:sldId id="647" r:id="rId12"/>
-    <p:sldId id="648" r:id="rId13"/>
-    <p:sldId id="649" r:id="rId14"/>
-    <p:sldId id="650" r:id="rId15"/>
-    <p:sldId id="652" r:id="rId16"/>
   </p:sldIdLst>
   <p:sldSz cx="12192000" cy="6858000"/>
   <p:notesSz cx="6858000" cy="9144000"/>
@@ -3772,837 +3767,6 @@
     <p:extLst>
       <p:ext uri="{BB962C8B-B14F-4D97-AF65-F5344CB8AC3E}">
         <p14:creationId xmlns:p14="http://schemas.microsoft.com/office/powerpoint/2010/main" val="675517902"/>
-      </p:ext>
-    </p:extLst>
-  </p:cSld>
-  <p:clrMapOvr>
-    <a:masterClrMapping/>
-  </p:clrMapOvr>
-</p:sld>
-</file>
-
-<file path=ppt/slides/slide11.xml><?xml version="1.0" encoding="utf-8"?>
-<p:sld xmlns:a="http://schemas.openxmlformats.org/drawingml/2006/main" xmlns:r="http://schemas.openxmlformats.org/officeDocument/2006/relationships" xmlns:p="http://schemas.openxmlformats.org/presentationml/2006/main">
-  <p:cSld>
-    <p:spTree>
-      <p:nvGrpSpPr>
-        <p:cNvPr id="1" name=""/>
-        <p:cNvGrpSpPr/>
-        <p:nvPr/>
-      </p:nvGrpSpPr>
-      <p:grpSpPr>
-        <a:xfrm>
-          <a:off x="0" y="0"/>
-          <a:ext cx="0" cy="0"/>
-          <a:chOff x="0" y="0"/>
-          <a:chExt cx="0" cy="0"/>
-        </a:xfrm>
-      </p:grpSpPr>
-      <p:sp>
-        <p:nvSpPr>
-          <p:cNvPr id="3" name="내용 개체 틀 2"/>
-          <p:cNvSpPr>
-            <a:spLocks noGrp="1"/>
-          </p:cNvSpPr>
-          <p:nvPr>
-            <p:ph idx="1"/>
-          </p:nvPr>
-        </p:nvSpPr>
-        <p:spPr>
-          <a:xfrm>
-            <a:off x="1981648" y="1628800"/>
-            <a:ext cx="8228707" cy="4496966"/>
-          </a:xfrm>
-        </p:spPr>
-        <p:txBody>
-          <a:bodyPr/>
-          <a:lstStyle/>
-          <a:p>
-            <a:pPr marL="0" indent="0">
-              <a:buNone/>
-            </a:pPr>
-            <a:r>
-              <a:rPr lang="ko-KR" altLang="en-US" sz="4000" b="1" dirty="0"/>
-              <a:t>모세가 장막에 들어서면</a:t>
-            </a:r>
-            <a:r>
-              <a:rPr lang="en-US" altLang="ko-KR" sz="4000" b="1" dirty="0"/>
-              <a:t>, </a:t>
-            </a:r>
-          </a:p>
-          <a:p>
-            <a:pPr marL="0" indent="0">
-              <a:buNone/>
-            </a:pPr>
-            <a:r>
-              <a:rPr lang="ko-KR" altLang="en-US" sz="4000" b="1" dirty="0" err="1">
-                <a:solidFill>
-                  <a:srgbClr val="FF0000"/>
-                </a:solidFill>
-              </a:rPr>
-              <a:t>구름기둥이</a:t>
-            </a:r>
-            <a:r>
-              <a:rPr lang="ko-KR" altLang="en-US" sz="4000" b="1" dirty="0">
-                <a:solidFill>
-                  <a:srgbClr val="FF0000"/>
-                </a:solidFill>
-              </a:rPr>
-              <a:t> 내려와서 </a:t>
-            </a:r>
-            <a:r>
-              <a:rPr lang="ko-KR" altLang="en-US" sz="4000" b="1" dirty="0"/>
-              <a:t>장막 어귀에 서고</a:t>
-            </a:r>
-            <a:r>
-              <a:rPr lang="en-US" altLang="ko-KR" sz="4000" b="1" dirty="0"/>
-              <a:t>, </a:t>
-            </a:r>
-            <a:r>
-              <a:rPr lang="ko-KR" altLang="en-US" sz="4000" b="1" dirty="0"/>
-              <a:t>주님께서 모세와 말씀하신다</a:t>
-            </a:r>
-            <a:r>
-              <a:rPr lang="en-US" altLang="ko-KR" sz="4000" b="1" dirty="0"/>
-              <a:t>. </a:t>
-            </a:r>
-            <a:endParaRPr lang="ko-KR" altLang="en-US" sz="4000" b="1" dirty="0"/>
-          </a:p>
-        </p:txBody>
-      </p:sp>
-      <p:sp>
-        <p:nvSpPr>
-          <p:cNvPr id="4" name="제목 3"/>
-          <p:cNvSpPr>
-            <a:spLocks noGrp="1"/>
-          </p:cNvSpPr>
-          <p:nvPr>
-            <p:ph type="title"/>
-          </p:nvPr>
-        </p:nvSpPr>
-        <p:spPr/>
-        <p:txBody>
-          <a:bodyPr/>
-          <a:lstStyle/>
-          <a:p>
-            <a:r>
-              <a:rPr lang="en-US" altLang="ko-KR" b="1" dirty="0"/>
-              <a:t>(</a:t>
-            </a:r>
-            <a:r>
-              <a:rPr lang="ko-KR" altLang="en-US" b="1" dirty="0" err="1"/>
-              <a:t>새번역</a:t>
-            </a:r>
-            <a:r>
-              <a:rPr lang="en-US" altLang="ko-KR" b="1" dirty="0"/>
-              <a:t>) </a:t>
-            </a:r>
-            <a:r>
-              <a:rPr lang="ko-KR" altLang="en-US" b="1" dirty="0"/>
-              <a:t>출애굽기 </a:t>
-            </a:r>
-            <a:r>
-              <a:rPr lang="en-US" altLang="ko-KR" b="1" dirty="0"/>
-              <a:t>33</a:t>
-            </a:r>
-            <a:r>
-              <a:rPr lang="ko-KR" altLang="en-US" b="1" dirty="0"/>
-              <a:t>장 </a:t>
-            </a:r>
-            <a:r>
-              <a:rPr lang="en-US" altLang="ko-KR" b="1" dirty="0"/>
-              <a:t>9</a:t>
-            </a:r>
-            <a:r>
-              <a:rPr lang="ko-KR" altLang="en-US" b="1" dirty="0"/>
-              <a:t>절</a:t>
-            </a:r>
-          </a:p>
-        </p:txBody>
-      </p:sp>
-    </p:spTree>
-    <p:extLst>
-      <p:ext uri="{BB962C8B-B14F-4D97-AF65-F5344CB8AC3E}">
-        <p14:creationId xmlns:p14="http://schemas.microsoft.com/office/powerpoint/2010/main" val="1463889751"/>
-      </p:ext>
-    </p:extLst>
-  </p:cSld>
-  <p:clrMapOvr>
-    <a:masterClrMapping/>
-  </p:clrMapOvr>
-</p:sld>
-</file>
-
-<file path=ppt/slides/slide12.xml><?xml version="1.0" encoding="utf-8"?>
-<p:sld xmlns:a="http://schemas.openxmlformats.org/drawingml/2006/main" xmlns:r="http://schemas.openxmlformats.org/officeDocument/2006/relationships" xmlns:p="http://schemas.openxmlformats.org/presentationml/2006/main">
-  <p:cSld>
-    <p:spTree>
-      <p:nvGrpSpPr>
-        <p:cNvPr id="1" name=""/>
-        <p:cNvGrpSpPr/>
-        <p:nvPr/>
-      </p:nvGrpSpPr>
-      <p:grpSpPr>
-        <a:xfrm>
-          <a:off x="0" y="0"/>
-          <a:ext cx="0" cy="0"/>
-          <a:chOff x="0" y="0"/>
-          <a:chExt cx="0" cy="0"/>
-        </a:xfrm>
-      </p:grpSpPr>
-      <p:sp>
-        <p:nvSpPr>
-          <p:cNvPr id="3" name="내용 개체 틀 2"/>
-          <p:cNvSpPr>
-            <a:spLocks noGrp="1"/>
-          </p:cNvSpPr>
-          <p:nvPr>
-            <p:ph idx="1"/>
-          </p:nvPr>
-        </p:nvSpPr>
-        <p:spPr>
-          <a:xfrm>
-            <a:off x="1981648" y="1844824"/>
-            <a:ext cx="8228707" cy="4280942"/>
-          </a:xfrm>
-        </p:spPr>
-        <p:txBody>
-          <a:bodyPr/>
-          <a:lstStyle/>
-          <a:p>
-            <a:pPr marL="0" indent="0">
-              <a:buNone/>
-            </a:pPr>
-            <a:r>
-              <a:rPr lang="ko-KR" altLang="en-US" sz="4000" b="1" dirty="0">
-                <a:solidFill>
-                  <a:srgbClr val="FF0000"/>
-                </a:solidFill>
-              </a:rPr>
-              <a:t>주님께서 </a:t>
-            </a:r>
-            <a:r>
-              <a:rPr lang="ko-KR" altLang="en-US" sz="4000" b="1" dirty="0" err="1">
-                <a:solidFill>
-                  <a:srgbClr val="FF0000"/>
-                </a:solidFill>
-              </a:rPr>
-              <a:t>구름기둥</a:t>
-            </a:r>
-            <a:r>
-              <a:rPr lang="ko-KR" altLang="en-US" sz="4000" b="1" dirty="0">
-                <a:solidFill>
-                  <a:srgbClr val="FF0000"/>
-                </a:solidFill>
-              </a:rPr>
-              <a:t> 가운데로 내려오시어 </a:t>
-            </a:r>
-            <a:r>
-              <a:rPr lang="ko-KR" altLang="en-US" sz="4000" b="1" dirty="0"/>
-              <a:t>장막 어귀에 서시고</a:t>
-            </a:r>
-            <a:r>
-              <a:rPr lang="en-US" altLang="ko-KR" sz="4000" b="1" dirty="0"/>
-              <a:t>, </a:t>
-            </a:r>
-            <a:r>
-              <a:rPr lang="ko-KR" altLang="en-US" sz="4000" b="1" dirty="0"/>
-              <a:t>아론과 </a:t>
-            </a:r>
-            <a:r>
-              <a:rPr lang="ko-KR" altLang="en-US" sz="4000" b="1" dirty="0" err="1"/>
-              <a:t>미리암을</a:t>
-            </a:r>
-            <a:r>
-              <a:rPr lang="ko-KR" altLang="en-US" sz="4000" b="1" dirty="0"/>
-              <a:t> 부르셨다</a:t>
-            </a:r>
-            <a:r>
-              <a:rPr lang="en-US" altLang="ko-KR" sz="4000" b="1" dirty="0"/>
-              <a:t>. </a:t>
-            </a:r>
-            <a:r>
-              <a:rPr lang="ko-KR" altLang="en-US" sz="4000" b="1" dirty="0"/>
-              <a:t>그 두 사람이 나가 서자</a:t>
-            </a:r>
-          </a:p>
-        </p:txBody>
-      </p:sp>
-      <p:sp>
-        <p:nvSpPr>
-          <p:cNvPr id="4" name="제목 3"/>
-          <p:cNvSpPr>
-            <a:spLocks noGrp="1"/>
-          </p:cNvSpPr>
-          <p:nvPr>
-            <p:ph type="title"/>
-          </p:nvPr>
-        </p:nvSpPr>
-        <p:spPr/>
-        <p:txBody>
-          <a:bodyPr/>
-          <a:lstStyle/>
-          <a:p>
-            <a:r>
-              <a:rPr lang="en-US" altLang="ko-KR" b="1" dirty="0"/>
-              <a:t>(</a:t>
-            </a:r>
-            <a:r>
-              <a:rPr lang="ko-KR" altLang="en-US" b="1" dirty="0" err="1"/>
-              <a:t>새번역</a:t>
-            </a:r>
-            <a:r>
-              <a:rPr lang="en-US" altLang="ko-KR" b="1" dirty="0"/>
-              <a:t>) </a:t>
-            </a:r>
-            <a:r>
-              <a:rPr lang="ko-KR" altLang="en-US" b="1" dirty="0"/>
-              <a:t>민수기 </a:t>
-            </a:r>
-            <a:r>
-              <a:rPr lang="en-US" altLang="ko-KR" b="1" dirty="0"/>
-              <a:t>12</a:t>
-            </a:r>
-            <a:r>
-              <a:rPr lang="ko-KR" altLang="en-US" b="1" dirty="0"/>
-              <a:t>장 </a:t>
-            </a:r>
-            <a:r>
-              <a:rPr lang="en-US" altLang="ko-KR" b="1" dirty="0"/>
-              <a:t>5</a:t>
-            </a:r>
-            <a:r>
-              <a:rPr lang="ko-KR" altLang="en-US" b="1" dirty="0"/>
-              <a:t>절</a:t>
-            </a:r>
-          </a:p>
-        </p:txBody>
-      </p:sp>
-    </p:spTree>
-    <p:extLst>
-      <p:ext uri="{BB962C8B-B14F-4D97-AF65-F5344CB8AC3E}">
-        <p14:creationId xmlns:p14="http://schemas.microsoft.com/office/powerpoint/2010/main" val="4167250700"/>
-      </p:ext>
-    </p:extLst>
-  </p:cSld>
-  <p:clrMapOvr>
-    <a:masterClrMapping/>
-  </p:clrMapOvr>
-</p:sld>
-</file>
-
-<file path=ppt/slides/slide13.xml><?xml version="1.0" encoding="utf-8"?>
-<p:sld xmlns:a="http://schemas.openxmlformats.org/drawingml/2006/main" xmlns:r="http://schemas.openxmlformats.org/officeDocument/2006/relationships" xmlns:p="http://schemas.openxmlformats.org/presentationml/2006/main">
-  <p:cSld>
-    <p:spTree>
-      <p:nvGrpSpPr>
-        <p:cNvPr id="1" name=""/>
-        <p:cNvGrpSpPr/>
-        <p:nvPr/>
-      </p:nvGrpSpPr>
-      <p:grpSpPr>
-        <a:xfrm>
-          <a:off x="0" y="0"/>
-          <a:ext cx="0" cy="0"/>
-          <a:chOff x="0" y="0"/>
-          <a:chExt cx="0" cy="0"/>
-        </a:xfrm>
-      </p:grpSpPr>
-      <p:sp>
-        <p:nvSpPr>
-          <p:cNvPr id="3" name="내용 개체 틀 2"/>
-          <p:cNvSpPr>
-            <a:spLocks noGrp="1"/>
-          </p:cNvSpPr>
-          <p:nvPr>
-            <p:ph idx="1"/>
-          </p:nvPr>
-        </p:nvSpPr>
-        <p:spPr>
-          <a:xfrm>
-            <a:off x="1981648" y="1628800"/>
-            <a:ext cx="8228707" cy="4496966"/>
-          </a:xfrm>
-        </p:spPr>
-        <p:txBody>
-          <a:bodyPr/>
-          <a:lstStyle/>
-          <a:p>
-            <a:pPr marL="0" indent="0">
-              <a:buNone/>
-            </a:pPr>
-            <a:r>
-              <a:rPr lang="ko-KR" altLang="en-US" sz="4000" b="1" dirty="0" err="1"/>
-              <a:t>성막을</a:t>
-            </a:r>
-            <a:r>
-              <a:rPr lang="ko-KR" altLang="en-US" sz="4000" b="1" dirty="0"/>
-              <a:t> 세우던 날</a:t>
-            </a:r>
-            <a:r>
-              <a:rPr lang="en-US" altLang="ko-KR" sz="4000" b="1" dirty="0"/>
-              <a:t>, </a:t>
-            </a:r>
-            <a:r>
-              <a:rPr lang="ko-KR" altLang="en-US" sz="4000" b="1" dirty="0">
-                <a:solidFill>
-                  <a:srgbClr val="0070C0"/>
-                </a:solidFill>
-              </a:rPr>
-              <a:t>구름이</a:t>
-            </a:r>
-            <a:r>
-              <a:rPr lang="ko-KR" altLang="en-US" sz="4000" b="1" dirty="0"/>
-              <a:t> </a:t>
-            </a:r>
-            <a:r>
-              <a:rPr lang="ko-KR" altLang="en-US" sz="4000" b="1" dirty="0" err="1"/>
-              <a:t>성막</a:t>
-            </a:r>
-            <a:r>
-              <a:rPr lang="en-US" altLang="ko-KR" sz="4000" b="1" dirty="0"/>
-              <a:t>, </a:t>
-            </a:r>
-          </a:p>
-          <a:p>
-            <a:pPr marL="0" indent="0">
-              <a:buNone/>
-            </a:pPr>
-            <a:r>
-              <a:rPr lang="ko-KR" altLang="en-US" sz="4000" b="1" dirty="0"/>
-              <a:t>곧 </a:t>
-            </a:r>
-            <a:r>
-              <a:rPr lang="ko-KR" altLang="en-US" sz="4000" b="1" dirty="0" err="1"/>
-              <a:t>증거궤가</a:t>
-            </a:r>
-            <a:r>
-              <a:rPr lang="ko-KR" altLang="en-US" sz="4000" b="1" dirty="0"/>
-              <a:t> 보관된 </a:t>
-            </a:r>
-            <a:r>
-              <a:rPr lang="ko-KR" altLang="en-US" sz="4000" b="1" dirty="0" err="1">
-                <a:solidFill>
-                  <a:srgbClr val="FF0000"/>
-                </a:solidFill>
-              </a:rPr>
-              <a:t>성막을</a:t>
-            </a:r>
-            <a:r>
-              <a:rPr lang="ko-KR" altLang="en-US" sz="4000" b="1" dirty="0">
-                <a:solidFill>
-                  <a:srgbClr val="FF0000"/>
-                </a:solidFill>
-              </a:rPr>
-              <a:t> 덮었다</a:t>
-            </a:r>
-            <a:r>
-              <a:rPr lang="en-US" altLang="ko-KR" sz="4000" b="1" dirty="0">
-                <a:solidFill>
-                  <a:srgbClr val="FF0000"/>
-                </a:solidFill>
-              </a:rPr>
-              <a:t>. </a:t>
-            </a:r>
-            <a:r>
-              <a:rPr lang="ko-KR" altLang="en-US" sz="4000" b="1" dirty="0"/>
-              <a:t>저녁에는 </a:t>
-            </a:r>
-            <a:r>
-              <a:rPr lang="ko-KR" altLang="en-US" sz="4000" b="1" dirty="0" err="1"/>
-              <a:t>성막</a:t>
-            </a:r>
-            <a:r>
-              <a:rPr lang="ko-KR" altLang="en-US" sz="4000" b="1" dirty="0"/>
-              <a:t> 위의 구름이 불처럼 보였으며</a:t>
-            </a:r>
-            <a:r>
-              <a:rPr lang="en-US" altLang="ko-KR" sz="4000" b="1" dirty="0"/>
-              <a:t>, </a:t>
-            </a:r>
-            <a:r>
-              <a:rPr lang="ko-KR" altLang="en-US" sz="4000" b="1" dirty="0"/>
-              <a:t>아침까지 그렇게 계속되었다</a:t>
-            </a:r>
-            <a:r>
-              <a:rPr lang="en-US" altLang="ko-KR" sz="4000" b="1" dirty="0"/>
-              <a:t>. </a:t>
-            </a:r>
-            <a:endParaRPr lang="ko-KR" altLang="en-US" sz="4000" b="1" dirty="0"/>
-          </a:p>
-        </p:txBody>
-      </p:sp>
-      <p:sp>
-        <p:nvSpPr>
-          <p:cNvPr id="4" name="제목 3"/>
-          <p:cNvSpPr>
-            <a:spLocks noGrp="1"/>
-          </p:cNvSpPr>
-          <p:nvPr>
-            <p:ph type="title"/>
-          </p:nvPr>
-        </p:nvSpPr>
-        <p:spPr/>
-        <p:txBody>
-          <a:bodyPr/>
-          <a:lstStyle/>
-          <a:p>
-            <a:r>
-              <a:rPr lang="en-US" altLang="ko-KR" b="1" dirty="0"/>
-              <a:t>(</a:t>
-            </a:r>
-            <a:r>
-              <a:rPr lang="ko-KR" altLang="en-US" b="1" dirty="0" err="1"/>
-              <a:t>새번역</a:t>
-            </a:r>
-            <a:r>
-              <a:rPr lang="en-US" altLang="ko-KR" b="1" dirty="0"/>
-              <a:t>) </a:t>
-            </a:r>
-            <a:r>
-              <a:rPr lang="ko-KR" altLang="en-US" b="1" dirty="0"/>
-              <a:t>민수기 </a:t>
-            </a:r>
-            <a:r>
-              <a:rPr lang="en-US" altLang="ko-KR" b="1" dirty="0"/>
-              <a:t>9</a:t>
-            </a:r>
-            <a:r>
-              <a:rPr lang="ko-KR" altLang="en-US" b="1" dirty="0"/>
-              <a:t>장 </a:t>
-            </a:r>
-            <a:r>
-              <a:rPr lang="en-US" altLang="ko-KR" b="1" dirty="0"/>
-              <a:t>15</a:t>
-            </a:r>
-            <a:r>
-              <a:rPr lang="ko-KR" altLang="en-US" b="1" dirty="0"/>
-              <a:t>절</a:t>
-            </a:r>
-          </a:p>
-        </p:txBody>
-      </p:sp>
-    </p:spTree>
-    <p:extLst>
-      <p:ext uri="{BB962C8B-B14F-4D97-AF65-F5344CB8AC3E}">
-        <p14:creationId xmlns:p14="http://schemas.microsoft.com/office/powerpoint/2010/main" val="793474953"/>
-      </p:ext>
-    </p:extLst>
-  </p:cSld>
-  <p:clrMapOvr>
-    <a:masterClrMapping/>
-  </p:clrMapOvr>
-</p:sld>
-</file>
-
-<file path=ppt/slides/slide14.xml><?xml version="1.0" encoding="utf-8"?>
-<p:sld xmlns:a="http://schemas.openxmlformats.org/drawingml/2006/main" xmlns:r="http://schemas.openxmlformats.org/officeDocument/2006/relationships" xmlns:p="http://schemas.openxmlformats.org/presentationml/2006/main">
-  <p:cSld>
-    <p:spTree>
-      <p:nvGrpSpPr>
-        <p:cNvPr id="1" name=""/>
-        <p:cNvGrpSpPr/>
-        <p:nvPr/>
-      </p:nvGrpSpPr>
-      <p:grpSpPr>
-        <a:xfrm>
-          <a:off x="0" y="0"/>
-          <a:ext cx="0" cy="0"/>
-          <a:chOff x="0" y="0"/>
-          <a:chExt cx="0" cy="0"/>
-        </a:xfrm>
-      </p:grpSpPr>
-      <p:sp>
-        <p:nvSpPr>
-          <p:cNvPr id="3" name="내용 개체 틀 2"/>
-          <p:cNvSpPr>
-            <a:spLocks noGrp="1"/>
-          </p:cNvSpPr>
-          <p:nvPr>
-            <p:ph idx="1"/>
-          </p:nvPr>
-        </p:nvSpPr>
-        <p:spPr>
-          <a:xfrm>
-            <a:off x="1981648" y="1628800"/>
-            <a:ext cx="8228707" cy="4496966"/>
-          </a:xfrm>
-        </p:spPr>
-        <p:txBody>
-          <a:bodyPr/>
-          <a:lstStyle/>
-          <a:p>
-            <a:pPr marL="0" indent="0">
-              <a:buNone/>
-            </a:pPr>
-            <a:r>
-              <a:rPr lang="ko-KR" altLang="en-US" sz="4000" b="1" dirty="0"/>
-              <a:t>제사장들이 성소에서 나올 때에</a:t>
-            </a:r>
-            <a:r>
-              <a:rPr lang="en-US" altLang="ko-KR" sz="4000" b="1" dirty="0"/>
-              <a:t>, </a:t>
-            </a:r>
-          </a:p>
-          <a:p>
-            <a:pPr marL="0" indent="0">
-              <a:buNone/>
-            </a:pPr>
-            <a:r>
-              <a:rPr lang="ko-KR" altLang="en-US" sz="4000" b="1" dirty="0"/>
-              <a:t>주님의 성전에 </a:t>
-            </a:r>
-            <a:r>
-              <a:rPr lang="ko-KR" altLang="en-US" sz="4000" b="1" dirty="0">
-                <a:solidFill>
-                  <a:srgbClr val="0070C0"/>
-                </a:solidFill>
-              </a:rPr>
-              <a:t>구름이 가득 찼다</a:t>
-            </a:r>
-            <a:r>
-              <a:rPr lang="en-US" altLang="ko-KR" sz="4000" b="1" dirty="0"/>
-              <a:t>. </a:t>
-            </a:r>
-          </a:p>
-        </p:txBody>
-      </p:sp>
-      <p:sp>
-        <p:nvSpPr>
-          <p:cNvPr id="4" name="제목 3"/>
-          <p:cNvSpPr>
-            <a:spLocks noGrp="1"/>
-          </p:cNvSpPr>
-          <p:nvPr>
-            <p:ph type="title"/>
-          </p:nvPr>
-        </p:nvSpPr>
-        <p:spPr/>
-        <p:txBody>
-          <a:bodyPr/>
-          <a:lstStyle/>
-          <a:p>
-            <a:r>
-              <a:rPr lang="en-US" altLang="ko-KR" b="1" dirty="0"/>
-              <a:t>(</a:t>
-            </a:r>
-            <a:r>
-              <a:rPr lang="ko-KR" altLang="en-US" b="1" dirty="0" err="1"/>
-              <a:t>새번역</a:t>
-            </a:r>
-            <a:r>
-              <a:rPr lang="en-US" altLang="ko-KR" b="1" dirty="0"/>
-              <a:t>) </a:t>
-            </a:r>
-            <a:r>
-              <a:rPr lang="ko-KR" altLang="en-US" b="1" dirty="0"/>
-              <a:t>열왕기상 </a:t>
-            </a:r>
-            <a:r>
-              <a:rPr lang="en-US" altLang="ko-KR" b="1" dirty="0"/>
-              <a:t>8</a:t>
-            </a:r>
-            <a:r>
-              <a:rPr lang="ko-KR" altLang="en-US" b="1" dirty="0"/>
-              <a:t>장 </a:t>
-            </a:r>
-            <a:r>
-              <a:rPr lang="en-US" altLang="ko-KR" b="1" dirty="0"/>
-              <a:t>10</a:t>
-            </a:r>
-            <a:r>
-              <a:rPr lang="ko-KR" altLang="en-US" b="1" dirty="0"/>
-              <a:t>절</a:t>
-            </a:r>
-          </a:p>
-        </p:txBody>
-      </p:sp>
-    </p:spTree>
-    <p:extLst>
-      <p:ext uri="{BB962C8B-B14F-4D97-AF65-F5344CB8AC3E}">
-        <p14:creationId xmlns:p14="http://schemas.microsoft.com/office/powerpoint/2010/main" val="3855232391"/>
-      </p:ext>
-    </p:extLst>
-  </p:cSld>
-  <p:clrMapOvr>
-    <a:masterClrMapping/>
-  </p:clrMapOvr>
-</p:sld>
-</file>
-
-<file path=ppt/slides/slide15.xml><?xml version="1.0" encoding="utf-8"?>
-<p:sld xmlns:a="http://schemas.openxmlformats.org/drawingml/2006/main" xmlns:r="http://schemas.openxmlformats.org/officeDocument/2006/relationships" xmlns:p="http://schemas.openxmlformats.org/presentationml/2006/main">
-  <p:cSld>
-    <p:spTree>
-      <p:nvGrpSpPr>
-        <p:cNvPr id="1" name=""/>
-        <p:cNvGrpSpPr/>
-        <p:nvPr/>
-      </p:nvGrpSpPr>
-      <p:grpSpPr>
-        <a:xfrm>
-          <a:off x="0" y="0"/>
-          <a:ext cx="0" cy="0"/>
-          <a:chOff x="0" y="0"/>
-          <a:chExt cx="0" cy="0"/>
-        </a:xfrm>
-      </p:grpSpPr>
-      <p:sp>
-        <p:nvSpPr>
-          <p:cNvPr id="3" name="내용 개체 틀 2"/>
-          <p:cNvSpPr>
-            <a:spLocks noGrp="1"/>
-          </p:cNvSpPr>
-          <p:nvPr>
-            <p:ph idx="1"/>
-          </p:nvPr>
-        </p:nvSpPr>
-        <p:spPr>
-          <a:xfrm>
-            <a:off x="1981648" y="1628800"/>
-            <a:ext cx="8228707" cy="4496966"/>
-          </a:xfrm>
-        </p:spPr>
-        <p:txBody>
-          <a:bodyPr/>
-          <a:lstStyle/>
-          <a:p>
-            <a:pPr marL="0" indent="0">
-              <a:buNone/>
-            </a:pPr>
-            <a:r>
-              <a:rPr lang="ko-KR" altLang="en-US" sz="4000" b="1" dirty="0"/>
-              <a:t>그런데 </a:t>
-            </a:r>
-            <a:r>
-              <a:rPr lang="ko-KR" altLang="en-US" sz="4000" b="1" dirty="0">
-                <a:solidFill>
-                  <a:srgbClr val="0070C0"/>
-                </a:solidFill>
-              </a:rPr>
-              <a:t>구름이 일어나서</a:t>
-            </a:r>
-            <a:r>
-              <a:rPr lang="en-US" altLang="ko-KR" sz="4000" b="1" dirty="0"/>
-              <a:t>, </a:t>
-            </a:r>
-          </a:p>
-          <a:p>
-            <a:pPr marL="0" indent="0">
-              <a:buNone/>
-            </a:pPr>
-            <a:r>
-              <a:rPr lang="ko-KR" altLang="en-US" sz="4000" b="1" dirty="0">
-                <a:solidFill>
-                  <a:srgbClr val="FF0000"/>
-                </a:solidFill>
-              </a:rPr>
-              <a:t>그들을 뒤덮었다</a:t>
-            </a:r>
-            <a:r>
-              <a:rPr lang="en-US" altLang="ko-KR" sz="4000" b="1" dirty="0">
-                <a:solidFill>
-                  <a:srgbClr val="FF0000"/>
-                </a:solidFill>
-              </a:rPr>
-              <a:t>. </a:t>
-            </a:r>
-          </a:p>
-          <a:p>
-            <a:pPr marL="0" indent="0">
-              <a:buNone/>
-            </a:pPr>
-            <a:r>
-              <a:rPr lang="ko-KR" altLang="en-US" sz="4000" b="1" dirty="0"/>
-              <a:t>그리고 구름 속에서 소리가 났다</a:t>
-            </a:r>
-            <a:r>
-              <a:rPr lang="en-US" altLang="ko-KR" sz="4000" b="1" dirty="0"/>
-              <a:t>.</a:t>
-            </a:r>
-          </a:p>
-          <a:p>
-            <a:pPr marL="0" indent="0">
-              <a:buNone/>
-            </a:pPr>
-            <a:r>
-              <a:rPr lang="en-US" altLang="ko-KR" sz="4000" b="1" dirty="0"/>
-              <a:t>"</a:t>
-            </a:r>
-            <a:r>
-              <a:rPr lang="ko-KR" altLang="en-US" sz="4000" b="1" dirty="0"/>
-              <a:t>이는 내 사랑하는 아들이다</a:t>
-            </a:r>
-            <a:r>
-              <a:rPr lang="en-US" altLang="ko-KR" sz="4000" b="1" dirty="0"/>
-              <a:t>. </a:t>
-            </a:r>
-            <a:r>
-              <a:rPr lang="ko-KR" altLang="en-US" sz="4000" b="1" dirty="0"/>
-              <a:t>너희는 그의 말을 들어라</a:t>
-            </a:r>
-            <a:r>
-              <a:rPr lang="en-US" altLang="ko-KR" sz="4000" b="1" dirty="0"/>
-              <a:t>."</a:t>
-            </a:r>
-            <a:endParaRPr lang="ko-KR" altLang="en-US" sz="4000" b="1" dirty="0"/>
-          </a:p>
-        </p:txBody>
-      </p:sp>
-      <p:sp>
-        <p:nvSpPr>
-          <p:cNvPr id="4" name="제목 3"/>
-          <p:cNvSpPr>
-            <a:spLocks noGrp="1"/>
-          </p:cNvSpPr>
-          <p:nvPr>
-            <p:ph type="title"/>
-          </p:nvPr>
-        </p:nvSpPr>
-        <p:spPr/>
-        <p:txBody>
-          <a:bodyPr/>
-          <a:lstStyle/>
-          <a:p>
-            <a:r>
-              <a:rPr lang="en-US" altLang="ko-KR" b="1" dirty="0"/>
-              <a:t>(</a:t>
-            </a:r>
-            <a:r>
-              <a:rPr lang="ko-KR" altLang="en-US" b="1" dirty="0" err="1"/>
-              <a:t>새번역</a:t>
-            </a:r>
-            <a:r>
-              <a:rPr lang="en-US" altLang="ko-KR" b="1" dirty="0"/>
-              <a:t>) </a:t>
-            </a:r>
-            <a:r>
-              <a:rPr lang="ko-KR" altLang="en-US" b="1" dirty="0"/>
-              <a:t>마가복음 </a:t>
-            </a:r>
-            <a:r>
-              <a:rPr lang="en-US" altLang="ko-KR" b="1" dirty="0"/>
-              <a:t>9</a:t>
-            </a:r>
-            <a:r>
-              <a:rPr lang="ko-KR" altLang="en-US" b="1" dirty="0"/>
-              <a:t>장 </a:t>
-            </a:r>
-            <a:r>
-              <a:rPr lang="en-US" altLang="ko-KR" b="1" dirty="0"/>
-              <a:t>7</a:t>
-            </a:r>
-            <a:r>
-              <a:rPr lang="ko-KR" altLang="en-US" b="1" dirty="0"/>
-              <a:t>절</a:t>
-            </a:r>
-          </a:p>
-        </p:txBody>
-      </p:sp>
-    </p:spTree>
-    <p:extLst>
-      <p:ext uri="{BB962C8B-B14F-4D97-AF65-F5344CB8AC3E}">
-        <p14:creationId xmlns:p14="http://schemas.microsoft.com/office/powerpoint/2010/main" val="3889279345"/>
       </p:ext>
     </p:extLst>
   </p:cSld>
